--- a/docs/docx_pptx/AeroPulse-NG_Pitch_Deck.pptx
+++ b/docs/docx_pptx/AeroPulse-NG_Pitch_Deck.pptx
@@ -5238,7 +5238,7 @@
               </a:defRPr>
             </a:pPr>
             <a:r>
-              <a:t>• 6-state Extended Kalman Filter</a:t>
+              <a:t>• 6-state Kalman filter (CV)</a:t>
             </a:r>
           </a:p>
         </p:txBody>
